--- a/public/videos/repositories/juku-map/juku-map-tech-preview.pptx
+++ b/public/videos/repositories/juku-map/juku-map-tech-preview.pptx
@@ -134,7 +134,7 @@
           <p:cNvPr id="2" name="タイトル 1">
             <a:extLst>
               <a:ext uri="{FF2B5EF4-FFF2-40B4-BE49-F238E27FC236}">
-                <a16:creationId xmlns:a16="http://schemas.microsoft.com/office/drawing/2014/main" id="{51B10A3C-7AA9-C1D5-ACD8-759949305AE9}"/>
+                <a16:creationId xmlns:a16="http://schemas.microsoft.com/office/drawing/2014/main" id="{6D23C209-181D-B725-F1B9-6EB6643A3E24}"/>
               </a:ext>
             </a:extLst>
           </p:cNvPr>
@@ -171,7 +171,7 @@
           <p:cNvPr id="3" name="字幕 2">
             <a:extLst>
               <a:ext uri="{FF2B5EF4-FFF2-40B4-BE49-F238E27FC236}">
-                <a16:creationId xmlns:a16="http://schemas.microsoft.com/office/drawing/2014/main" id="{227A7EF2-53AB-18C3-352B-8A95B91EFF0A}"/>
+                <a16:creationId xmlns:a16="http://schemas.microsoft.com/office/drawing/2014/main" id="{9645349E-8BCE-0A3D-2D43-235B8FD31022}"/>
               </a:ext>
             </a:extLst>
           </p:cNvPr>
@@ -241,7 +241,7 @@
           <p:cNvPr id="4" name="日付プレースホルダー 3">
             <a:extLst>
               <a:ext uri="{FF2B5EF4-FFF2-40B4-BE49-F238E27FC236}">
-                <a16:creationId xmlns:a16="http://schemas.microsoft.com/office/drawing/2014/main" id="{7045B04F-D411-9D7F-BD8A-84EFE534E641}"/>
+                <a16:creationId xmlns:a16="http://schemas.microsoft.com/office/drawing/2014/main" id="{210DA08E-30FD-03CE-1C40-FFAD38AAF580}"/>
               </a:ext>
             </a:extLst>
           </p:cNvPr>
@@ -257,7 +257,7 @@
           <a:bodyPr/>
           <a:lstStyle/>
           <a:p>
-            <a:fld id="{D3BEA99A-265A-4682-9AAB-F49FC7638CC9}" type="datetimeFigureOut">
+            <a:fld id="{8C02A746-D7BA-431B-A4C4-1A55AC47355C}" type="datetimeFigureOut">
               <a:rPr kumimoji="1" lang="ja-JP" altLang="en-US" smtClean="0"/>
               <a:t>2026/7/30</a:t>
             </a:fld>
@@ -270,7 +270,7 @@
           <p:cNvPr id="5" name="フッター プレースホルダー 4">
             <a:extLst>
               <a:ext uri="{FF2B5EF4-FFF2-40B4-BE49-F238E27FC236}">
-                <a16:creationId xmlns:a16="http://schemas.microsoft.com/office/drawing/2014/main" id="{1482D551-D46C-ADD8-6E27-DD7A84790149}"/>
+                <a16:creationId xmlns:a16="http://schemas.microsoft.com/office/drawing/2014/main" id="{BAE7D525-B4DF-DDE7-73C2-CDF0373DFD58}"/>
               </a:ext>
             </a:extLst>
           </p:cNvPr>
@@ -295,7 +295,7 @@
           <p:cNvPr id="6" name="スライド番号プレースホルダー 5">
             <a:extLst>
               <a:ext uri="{FF2B5EF4-FFF2-40B4-BE49-F238E27FC236}">
-                <a16:creationId xmlns:a16="http://schemas.microsoft.com/office/drawing/2014/main" id="{F73E1FD6-6CB1-C000-F5A2-296E1B766212}"/>
+                <a16:creationId xmlns:a16="http://schemas.microsoft.com/office/drawing/2014/main" id="{3B408091-ED90-2F72-DD8F-47744404A092}"/>
               </a:ext>
             </a:extLst>
           </p:cNvPr>
@@ -311,7 +311,7 @@
           <a:bodyPr/>
           <a:lstStyle/>
           <a:p>
-            <a:fld id="{F42F3BCE-466E-48CC-A1F6-C3CF3B61889B}" type="slidenum">
+            <a:fld id="{6F02A835-3153-418F-A232-3C66D7F83ED1}" type="slidenum">
               <a:rPr kumimoji="1" lang="ja-JP" altLang="en-US" smtClean="0"/>
               <a:t>‹#›</a:t>
             </a:fld>
@@ -322,7 +322,7 @@
     </p:spTree>
     <p:extLst>
       <p:ext uri="{BB962C8B-B14F-4D97-AF65-F5344CB8AC3E}">
-        <p14:creationId xmlns:p14="http://schemas.microsoft.com/office/powerpoint/2010/main" val="1868377522"/>
+        <p14:creationId xmlns:p14="http://schemas.microsoft.com/office/powerpoint/2010/main" val="2751149428"/>
       </p:ext>
     </p:extLst>
   </p:cSld>
@@ -354,7 +354,7 @@
           <p:cNvPr id="2" name="タイトル 1">
             <a:extLst>
               <a:ext uri="{FF2B5EF4-FFF2-40B4-BE49-F238E27FC236}">
-                <a16:creationId xmlns:a16="http://schemas.microsoft.com/office/drawing/2014/main" id="{18649A85-7476-9095-C0B1-694991066D78}"/>
+                <a16:creationId xmlns:a16="http://schemas.microsoft.com/office/drawing/2014/main" id="{09C8D589-83AC-3D92-BA73-F25EF0D8E04A}"/>
               </a:ext>
             </a:extLst>
           </p:cNvPr>
@@ -382,7 +382,7 @@
           <p:cNvPr id="3" name="縦書きテキスト プレースホルダー 2">
             <a:extLst>
               <a:ext uri="{FF2B5EF4-FFF2-40B4-BE49-F238E27FC236}">
-                <a16:creationId xmlns:a16="http://schemas.microsoft.com/office/drawing/2014/main" id="{B0AE7F4A-A095-2A26-A5E7-08CB342A864E}"/>
+                <a16:creationId xmlns:a16="http://schemas.microsoft.com/office/drawing/2014/main" id="{595E2084-22A1-2B0C-6B79-BBC3DCAC835C}"/>
               </a:ext>
             </a:extLst>
           </p:cNvPr>
@@ -471,7 +471,7 @@
           <p:cNvPr id="4" name="日付プレースホルダー 3">
             <a:extLst>
               <a:ext uri="{FF2B5EF4-FFF2-40B4-BE49-F238E27FC236}">
-                <a16:creationId xmlns:a16="http://schemas.microsoft.com/office/drawing/2014/main" id="{BE748657-FA1D-4055-3362-E985CDFC45EE}"/>
+                <a16:creationId xmlns:a16="http://schemas.microsoft.com/office/drawing/2014/main" id="{4AD3F67F-FC88-F036-1839-78BD4B729388}"/>
               </a:ext>
             </a:extLst>
           </p:cNvPr>
@@ -487,7 +487,7 @@
           <a:bodyPr/>
           <a:lstStyle/>
           <a:p>
-            <a:fld id="{D3BEA99A-265A-4682-9AAB-F49FC7638CC9}" type="datetimeFigureOut">
+            <a:fld id="{8C02A746-D7BA-431B-A4C4-1A55AC47355C}" type="datetimeFigureOut">
               <a:rPr kumimoji="1" lang="ja-JP" altLang="en-US" smtClean="0"/>
               <a:t>2026/7/30</a:t>
             </a:fld>
@@ -500,7 +500,7 @@
           <p:cNvPr id="5" name="フッター プレースホルダー 4">
             <a:extLst>
               <a:ext uri="{FF2B5EF4-FFF2-40B4-BE49-F238E27FC236}">
-                <a16:creationId xmlns:a16="http://schemas.microsoft.com/office/drawing/2014/main" id="{AF91B87F-F759-736E-58AB-DCB2E4746544}"/>
+                <a16:creationId xmlns:a16="http://schemas.microsoft.com/office/drawing/2014/main" id="{AFD782EC-8E2E-4B0A-2E4D-929DEBAFC0CC}"/>
               </a:ext>
             </a:extLst>
           </p:cNvPr>
@@ -525,7 +525,7 @@
           <p:cNvPr id="6" name="スライド番号プレースホルダー 5">
             <a:extLst>
               <a:ext uri="{FF2B5EF4-FFF2-40B4-BE49-F238E27FC236}">
-                <a16:creationId xmlns:a16="http://schemas.microsoft.com/office/drawing/2014/main" id="{1EC05D73-282E-D8E0-E23E-E9EB6BAD7603}"/>
+                <a16:creationId xmlns:a16="http://schemas.microsoft.com/office/drawing/2014/main" id="{A4CB4468-AF68-D0BD-5C0B-C655D23B186C}"/>
               </a:ext>
             </a:extLst>
           </p:cNvPr>
@@ -541,7 +541,7 @@
           <a:bodyPr/>
           <a:lstStyle/>
           <a:p>
-            <a:fld id="{F42F3BCE-466E-48CC-A1F6-C3CF3B61889B}" type="slidenum">
+            <a:fld id="{6F02A835-3153-418F-A232-3C66D7F83ED1}" type="slidenum">
               <a:rPr kumimoji="1" lang="ja-JP" altLang="en-US" smtClean="0"/>
               <a:t>‹#›</a:t>
             </a:fld>
@@ -552,7 +552,7 @@
     </p:spTree>
     <p:extLst>
       <p:ext uri="{BB962C8B-B14F-4D97-AF65-F5344CB8AC3E}">
-        <p14:creationId xmlns:p14="http://schemas.microsoft.com/office/powerpoint/2010/main" val="2647508121"/>
+        <p14:creationId xmlns:p14="http://schemas.microsoft.com/office/powerpoint/2010/main" val="2014807547"/>
       </p:ext>
     </p:extLst>
   </p:cSld>
@@ -584,7 +584,7 @@
           <p:cNvPr id="2" name="縦書きタイトル 1">
             <a:extLst>
               <a:ext uri="{FF2B5EF4-FFF2-40B4-BE49-F238E27FC236}">
-                <a16:creationId xmlns:a16="http://schemas.microsoft.com/office/drawing/2014/main" id="{02622467-1CE0-9E35-4D83-0F2BA6935E97}"/>
+                <a16:creationId xmlns:a16="http://schemas.microsoft.com/office/drawing/2014/main" id="{9F721BB0-BA78-5BA9-EC97-22C1A0ECB61D}"/>
               </a:ext>
             </a:extLst>
           </p:cNvPr>
@@ -617,7 +617,7 @@
           <p:cNvPr id="3" name="縦書きテキスト プレースホルダー 2">
             <a:extLst>
               <a:ext uri="{FF2B5EF4-FFF2-40B4-BE49-F238E27FC236}">
-                <a16:creationId xmlns:a16="http://schemas.microsoft.com/office/drawing/2014/main" id="{0B58FDD3-6228-0B7E-E9BB-ABA6589088BC}"/>
+                <a16:creationId xmlns:a16="http://schemas.microsoft.com/office/drawing/2014/main" id="{53D2DEE2-82CC-B436-E94C-FC7CE1C469D1}"/>
               </a:ext>
             </a:extLst>
           </p:cNvPr>
@@ -711,7 +711,7 @@
           <p:cNvPr id="4" name="日付プレースホルダー 3">
             <a:extLst>
               <a:ext uri="{FF2B5EF4-FFF2-40B4-BE49-F238E27FC236}">
-                <a16:creationId xmlns:a16="http://schemas.microsoft.com/office/drawing/2014/main" id="{094DD94D-8554-8891-E500-F7E1D3FC6E4D}"/>
+                <a16:creationId xmlns:a16="http://schemas.microsoft.com/office/drawing/2014/main" id="{264B0621-9B3E-3C13-31C6-143933606FE8}"/>
               </a:ext>
             </a:extLst>
           </p:cNvPr>
@@ -727,7 +727,7 @@
           <a:bodyPr/>
           <a:lstStyle/>
           <a:p>
-            <a:fld id="{D3BEA99A-265A-4682-9AAB-F49FC7638CC9}" type="datetimeFigureOut">
+            <a:fld id="{8C02A746-D7BA-431B-A4C4-1A55AC47355C}" type="datetimeFigureOut">
               <a:rPr kumimoji="1" lang="ja-JP" altLang="en-US" smtClean="0"/>
               <a:t>2026/7/30</a:t>
             </a:fld>
@@ -740,7 +740,7 @@
           <p:cNvPr id="5" name="フッター プレースホルダー 4">
             <a:extLst>
               <a:ext uri="{FF2B5EF4-FFF2-40B4-BE49-F238E27FC236}">
-                <a16:creationId xmlns:a16="http://schemas.microsoft.com/office/drawing/2014/main" id="{1677B9BE-B5B7-0313-D279-25D3B2DF7FE8}"/>
+                <a16:creationId xmlns:a16="http://schemas.microsoft.com/office/drawing/2014/main" id="{3DC4B1A6-4541-2075-3BCC-CA9D5BAF83B6}"/>
               </a:ext>
             </a:extLst>
           </p:cNvPr>
@@ -765,7 +765,7 @@
           <p:cNvPr id="6" name="スライド番号プレースホルダー 5">
             <a:extLst>
               <a:ext uri="{FF2B5EF4-FFF2-40B4-BE49-F238E27FC236}">
-                <a16:creationId xmlns:a16="http://schemas.microsoft.com/office/drawing/2014/main" id="{AE7B5008-B0BE-3082-2AC7-2010D1C8C812}"/>
+                <a16:creationId xmlns:a16="http://schemas.microsoft.com/office/drawing/2014/main" id="{88C8EF1E-BC57-A1EA-3367-EE98ABDB074A}"/>
               </a:ext>
             </a:extLst>
           </p:cNvPr>
@@ -781,7 +781,7 @@
           <a:bodyPr/>
           <a:lstStyle/>
           <a:p>
-            <a:fld id="{F42F3BCE-466E-48CC-A1F6-C3CF3B61889B}" type="slidenum">
+            <a:fld id="{6F02A835-3153-418F-A232-3C66D7F83ED1}" type="slidenum">
               <a:rPr kumimoji="1" lang="ja-JP" altLang="en-US" smtClean="0"/>
               <a:t>‹#›</a:t>
             </a:fld>
@@ -792,7 +792,7 @@
     </p:spTree>
     <p:extLst>
       <p:ext uri="{BB962C8B-B14F-4D97-AF65-F5344CB8AC3E}">
-        <p14:creationId xmlns:p14="http://schemas.microsoft.com/office/powerpoint/2010/main" val="176187722"/>
+        <p14:creationId xmlns:p14="http://schemas.microsoft.com/office/powerpoint/2010/main" val="1813134455"/>
       </p:ext>
     </p:extLst>
   </p:cSld>
@@ -824,7 +824,7 @@
           <p:cNvPr id="2" name="タイトル 1">
             <a:extLst>
               <a:ext uri="{FF2B5EF4-FFF2-40B4-BE49-F238E27FC236}">
-                <a16:creationId xmlns:a16="http://schemas.microsoft.com/office/drawing/2014/main" id="{ADB6BBF1-AE1B-FCA7-94CA-E9A1DA07E1EB}"/>
+                <a16:creationId xmlns:a16="http://schemas.microsoft.com/office/drawing/2014/main" id="{41379BB0-9A2A-D148-2113-273BA26CF3F1}"/>
               </a:ext>
             </a:extLst>
           </p:cNvPr>
@@ -852,7 +852,7 @@
           <p:cNvPr id="3" name="コンテンツ プレースホルダー 2">
             <a:extLst>
               <a:ext uri="{FF2B5EF4-FFF2-40B4-BE49-F238E27FC236}">
-                <a16:creationId xmlns:a16="http://schemas.microsoft.com/office/drawing/2014/main" id="{4E054F75-E5D1-222E-E10C-247892C16AD5}"/>
+                <a16:creationId xmlns:a16="http://schemas.microsoft.com/office/drawing/2014/main" id="{48BDBF5E-7586-2B9D-7DF4-86D33D596096}"/>
               </a:ext>
             </a:extLst>
           </p:cNvPr>
@@ -941,7 +941,7 @@
           <p:cNvPr id="4" name="日付プレースホルダー 3">
             <a:extLst>
               <a:ext uri="{FF2B5EF4-FFF2-40B4-BE49-F238E27FC236}">
-                <a16:creationId xmlns:a16="http://schemas.microsoft.com/office/drawing/2014/main" id="{F49A997A-97C3-85CA-116F-400A65365BEE}"/>
+                <a16:creationId xmlns:a16="http://schemas.microsoft.com/office/drawing/2014/main" id="{5BCB45FB-4646-0DF3-9CAD-5CC670263B14}"/>
               </a:ext>
             </a:extLst>
           </p:cNvPr>
@@ -957,7 +957,7 @@
           <a:bodyPr/>
           <a:lstStyle/>
           <a:p>
-            <a:fld id="{D3BEA99A-265A-4682-9AAB-F49FC7638CC9}" type="datetimeFigureOut">
+            <a:fld id="{8C02A746-D7BA-431B-A4C4-1A55AC47355C}" type="datetimeFigureOut">
               <a:rPr kumimoji="1" lang="ja-JP" altLang="en-US" smtClean="0"/>
               <a:t>2026/7/30</a:t>
             </a:fld>
@@ -970,7 +970,7 @@
           <p:cNvPr id="5" name="フッター プレースホルダー 4">
             <a:extLst>
               <a:ext uri="{FF2B5EF4-FFF2-40B4-BE49-F238E27FC236}">
-                <a16:creationId xmlns:a16="http://schemas.microsoft.com/office/drawing/2014/main" id="{D1902675-FD4D-8521-C417-264D4C4CE5FF}"/>
+                <a16:creationId xmlns:a16="http://schemas.microsoft.com/office/drawing/2014/main" id="{24A4D2A3-6137-D7EA-CE49-8299ECBC849B}"/>
               </a:ext>
             </a:extLst>
           </p:cNvPr>
@@ -995,7 +995,7 @@
           <p:cNvPr id="6" name="スライド番号プレースホルダー 5">
             <a:extLst>
               <a:ext uri="{FF2B5EF4-FFF2-40B4-BE49-F238E27FC236}">
-                <a16:creationId xmlns:a16="http://schemas.microsoft.com/office/drawing/2014/main" id="{FAAB3133-F7AD-11CC-B438-7F48155770EF}"/>
+                <a16:creationId xmlns:a16="http://schemas.microsoft.com/office/drawing/2014/main" id="{B13CE3F6-6D7D-F11F-5215-1196F0AE4EE0}"/>
               </a:ext>
             </a:extLst>
           </p:cNvPr>
@@ -1011,7 +1011,7 @@
           <a:bodyPr/>
           <a:lstStyle/>
           <a:p>
-            <a:fld id="{F42F3BCE-466E-48CC-A1F6-C3CF3B61889B}" type="slidenum">
+            <a:fld id="{6F02A835-3153-418F-A232-3C66D7F83ED1}" type="slidenum">
               <a:rPr kumimoji="1" lang="ja-JP" altLang="en-US" smtClean="0"/>
               <a:t>‹#›</a:t>
             </a:fld>
@@ -1022,7 +1022,7 @@
     </p:spTree>
     <p:extLst>
       <p:ext uri="{BB962C8B-B14F-4D97-AF65-F5344CB8AC3E}">
-        <p14:creationId xmlns:p14="http://schemas.microsoft.com/office/powerpoint/2010/main" val="2515803928"/>
+        <p14:creationId xmlns:p14="http://schemas.microsoft.com/office/powerpoint/2010/main" val="2207546588"/>
       </p:ext>
     </p:extLst>
   </p:cSld>
@@ -1054,7 +1054,7 @@
           <p:cNvPr id="2" name="タイトル 1">
             <a:extLst>
               <a:ext uri="{FF2B5EF4-FFF2-40B4-BE49-F238E27FC236}">
-                <a16:creationId xmlns:a16="http://schemas.microsoft.com/office/drawing/2014/main" id="{E10CE44F-CF69-F776-F9D7-2EF5A52AE704}"/>
+                <a16:creationId xmlns:a16="http://schemas.microsoft.com/office/drawing/2014/main" id="{4DC928D9-3262-FBFA-64A5-74972C810E3B}"/>
               </a:ext>
             </a:extLst>
           </p:cNvPr>
@@ -1091,7 +1091,7 @@
           <p:cNvPr id="3" name="テキスト プレースホルダー 2">
             <a:extLst>
               <a:ext uri="{FF2B5EF4-FFF2-40B4-BE49-F238E27FC236}">
-                <a16:creationId xmlns:a16="http://schemas.microsoft.com/office/drawing/2014/main" id="{0DFB2A2B-E507-7E70-6A59-8D77E52668EB}"/>
+                <a16:creationId xmlns:a16="http://schemas.microsoft.com/office/drawing/2014/main" id="{680CF49F-418A-4B06-AC89-CE117C0DC5F6}"/>
               </a:ext>
             </a:extLst>
           </p:cNvPr>
@@ -1216,7 +1216,7 @@
           <p:cNvPr id="4" name="日付プレースホルダー 3">
             <a:extLst>
               <a:ext uri="{FF2B5EF4-FFF2-40B4-BE49-F238E27FC236}">
-                <a16:creationId xmlns:a16="http://schemas.microsoft.com/office/drawing/2014/main" id="{4B5FE46D-152F-5FA8-9017-99C48227BCFC}"/>
+                <a16:creationId xmlns:a16="http://schemas.microsoft.com/office/drawing/2014/main" id="{691EF9F2-61A0-A5F6-89F7-5E7BA44025E1}"/>
               </a:ext>
             </a:extLst>
           </p:cNvPr>
@@ -1232,7 +1232,7 @@
           <a:bodyPr/>
           <a:lstStyle/>
           <a:p>
-            <a:fld id="{D3BEA99A-265A-4682-9AAB-F49FC7638CC9}" type="datetimeFigureOut">
+            <a:fld id="{8C02A746-D7BA-431B-A4C4-1A55AC47355C}" type="datetimeFigureOut">
               <a:rPr kumimoji="1" lang="ja-JP" altLang="en-US" smtClean="0"/>
               <a:t>2026/7/30</a:t>
             </a:fld>
@@ -1245,7 +1245,7 @@
           <p:cNvPr id="5" name="フッター プレースホルダー 4">
             <a:extLst>
               <a:ext uri="{FF2B5EF4-FFF2-40B4-BE49-F238E27FC236}">
-                <a16:creationId xmlns:a16="http://schemas.microsoft.com/office/drawing/2014/main" id="{A75615BB-9219-1BFB-EF8F-9504465DA780}"/>
+                <a16:creationId xmlns:a16="http://schemas.microsoft.com/office/drawing/2014/main" id="{B8AD2793-05D8-7626-84E2-9BB1E7A85915}"/>
               </a:ext>
             </a:extLst>
           </p:cNvPr>
@@ -1270,7 +1270,7 @@
           <p:cNvPr id="6" name="スライド番号プレースホルダー 5">
             <a:extLst>
               <a:ext uri="{FF2B5EF4-FFF2-40B4-BE49-F238E27FC236}">
-                <a16:creationId xmlns:a16="http://schemas.microsoft.com/office/drawing/2014/main" id="{CA4E4033-7DE2-37FE-D71A-0D8233EB13C8}"/>
+                <a16:creationId xmlns:a16="http://schemas.microsoft.com/office/drawing/2014/main" id="{1E145F3C-07A9-FBA2-4C7D-4885449CDD48}"/>
               </a:ext>
             </a:extLst>
           </p:cNvPr>
@@ -1286,7 +1286,7 @@
           <a:bodyPr/>
           <a:lstStyle/>
           <a:p>
-            <a:fld id="{F42F3BCE-466E-48CC-A1F6-C3CF3B61889B}" type="slidenum">
+            <a:fld id="{6F02A835-3153-418F-A232-3C66D7F83ED1}" type="slidenum">
               <a:rPr kumimoji="1" lang="ja-JP" altLang="en-US" smtClean="0"/>
               <a:t>‹#›</a:t>
             </a:fld>
@@ -1297,7 +1297,7 @@
     </p:spTree>
     <p:extLst>
       <p:ext uri="{BB962C8B-B14F-4D97-AF65-F5344CB8AC3E}">
-        <p14:creationId xmlns:p14="http://schemas.microsoft.com/office/powerpoint/2010/main" val="242928848"/>
+        <p14:creationId xmlns:p14="http://schemas.microsoft.com/office/powerpoint/2010/main" val="1811107119"/>
       </p:ext>
     </p:extLst>
   </p:cSld>
@@ -1329,7 +1329,7 @@
           <p:cNvPr id="2" name="タイトル 1">
             <a:extLst>
               <a:ext uri="{FF2B5EF4-FFF2-40B4-BE49-F238E27FC236}">
-                <a16:creationId xmlns:a16="http://schemas.microsoft.com/office/drawing/2014/main" id="{C66DB4A7-6B0F-16AB-E899-B45675C8FE9A}"/>
+                <a16:creationId xmlns:a16="http://schemas.microsoft.com/office/drawing/2014/main" id="{B756C2DF-0A69-D6A3-3BBE-45FF64E5A6C7}"/>
               </a:ext>
             </a:extLst>
           </p:cNvPr>
@@ -1357,7 +1357,7 @@
           <p:cNvPr id="3" name="コンテンツ プレースホルダー 2">
             <a:extLst>
               <a:ext uri="{FF2B5EF4-FFF2-40B4-BE49-F238E27FC236}">
-                <a16:creationId xmlns:a16="http://schemas.microsoft.com/office/drawing/2014/main" id="{09C58B53-2303-7312-9710-5E88F1AFE271}"/>
+                <a16:creationId xmlns:a16="http://schemas.microsoft.com/office/drawing/2014/main" id="{9268917D-6DE0-7AE2-2864-E62474235561}"/>
               </a:ext>
             </a:extLst>
           </p:cNvPr>
@@ -1451,7 +1451,7 @@
           <p:cNvPr id="4" name="コンテンツ プレースホルダー 3">
             <a:extLst>
               <a:ext uri="{FF2B5EF4-FFF2-40B4-BE49-F238E27FC236}">
-                <a16:creationId xmlns:a16="http://schemas.microsoft.com/office/drawing/2014/main" id="{E0EB4087-FCF9-93BF-B46F-E2092B700AAA}"/>
+                <a16:creationId xmlns:a16="http://schemas.microsoft.com/office/drawing/2014/main" id="{0B627E45-66EA-8C62-364B-A024FE2269A6}"/>
               </a:ext>
             </a:extLst>
           </p:cNvPr>
@@ -1545,7 +1545,7 @@
           <p:cNvPr id="5" name="日付プレースホルダー 4">
             <a:extLst>
               <a:ext uri="{FF2B5EF4-FFF2-40B4-BE49-F238E27FC236}">
-                <a16:creationId xmlns:a16="http://schemas.microsoft.com/office/drawing/2014/main" id="{8A50C667-D565-C2E8-4E24-878B03DA4313}"/>
+                <a16:creationId xmlns:a16="http://schemas.microsoft.com/office/drawing/2014/main" id="{E0907E06-D76D-7C92-F49A-E7D74FC4C561}"/>
               </a:ext>
             </a:extLst>
           </p:cNvPr>
@@ -1561,7 +1561,7 @@
           <a:bodyPr/>
           <a:lstStyle/>
           <a:p>
-            <a:fld id="{D3BEA99A-265A-4682-9AAB-F49FC7638CC9}" type="datetimeFigureOut">
+            <a:fld id="{8C02A746-D7BA-431B-A4C4-1A55AC47355C}" type="datetimeFigureOut">
               <a:rPr kumimoji="1" lang="ja-JP" altLang="en-US" smtClean="0"/>
               <a:t>2026/7/30</a:t>
             </a:fld>
@@ -1574,7 +1574,7 @@
           <p:cNvPr id="6" name="フッター プレースホルダー 5">
             <a:extLst>
               <a:ext uri="{FF2B5EF4-FFF2-40B4-BE49-F238E27FC236}">
-                <a16:creationId xmlns:a16="http://schemas.microsoft.com/office/drawing/2014/main" id="{368FC44C-1791-0784-C66C-FFBE20A3FE52}"/>
+                <a16:creationId xmlns:a16="http://schemas.microsoft.com/office/drawing/2014/main" id="{611B6293-BF9A-3AE3-5B9C-D61E4475982C}"/>
               </a:ext>
             </a:extLst>
           </p:cNvPr>
@@ -1599,7 +1599,7 @@
           <p:cNvPr id="7" name="スライド番号プレースホルダー 6">
             <a:extLst>
               <a:ext uri="{FF2B5EF4-FFF2-40B4-BE49-F238E27FC236}">
-                <a16:creationId xmlns:a16="http://schemas.microsoft.com/office/drawing/2014/main" id="{A17A3FB8-5B08-C299-20C5-979ACE7FC8BB}"/>
+                <a16:creationId xmlns:a16="http://schemas.microsoft.com/office/drawing/2014/main" id="{FBB04582-EFF4-9ADC-E80F-257BA17A3041}"/>
               </a:ext>
             </a:extLst>
           </p:cNvPr>
@@ -1615,7 +1615,7 @@
           <a:bodyPr/>
           <a:lstStyle/>
           <a:p>
-            <a:fld id="{F42F3BCE-466E-48CC-A1F6-C3CF3B61889B}" type="slidenum">
+            <a:fld id="{6F02A835-3153-418F-A232-3C66D7F83ED1}" type="slidenum">
               <a:rPr kumimoji="1" lang="ja-JP" altLang="en-US" smtClean="0"/>
               <a:t>‹#›</a:t>
             </a:fld>
@@ -1626,7 +1626,7 @@
     </p:spTree>
     <p:extLst>
       <p:ext uri="{BB962C8B-B14F-4D97-AF65-F5344CB8AC3E}">
-        <p14:creationId xmlns:p14="http://schemas.microsoft.com/office/powerpoint/2010/main" val="4066775867"/>
+        <p14:creationId xmlns:p14="http://schemas.microsoft.com/office/powerpoint/2010/main" val="3004188237"/>
       </p:ext>
     </p:extLst>
   </p:cSld>
@@ -1658,7 +1658,7 @@
           <p:cNvPr id="2" name="タイトル 1">
             <a:extLst>
               <a:ext uri="{FF2B5EF4-FFF2-40B4-BE49-F238E27FC236}">
-                <a16:creationId xmlns:a16="http://schemas.microsoft.com/office/drawing/2014/main" id="{AC72BCA7-1F41-90BA-850C-089994C92C9E}"/>
+                <a16:creationId xmlns:a16="http://schemas.microsoft.com/office/drawing/2014/main" id="{019B2E5F-B693-6F34-E91D-B1A2D8F3D3C7}"/>
               </a:ext>
             </a:extLst>
           </p:cNvPr>
@@ -1691,7 +1691,7 @@
           <p:cNvPr id="3" name="テキスト プレースホルダー 2">
             <a:extLst>
               <a:ext uri="{FF2B5EF4-FFF2-40B4-BE49-F238E27FC236}">
-                <a16:creationId xmlns:a16="http://schemas.microsoft.com/office/drawing/2014/main" id="{C139E2B1-9213-6790-BF02-8262E9A46F39}"/>
+                <a16:creationId xmlns:a16="http://schemas.microsoft.com/office/drawing/2014/main" id="{37A353DA-6E0B-7FC2-B0DB-0616EA79D116}"/>
               </a:ext>
             </a:extLst>
           </p:cNvPr>
@@ -1762,7 +1762,7 @@
           <p:cNvPr id="4" name="コンテンツ プレースホルダー 3">
             <a:extLst>
               <a:ext uri="{FF2B5EF4-FFF2-40B4-BE49-F238E27FC236}">
-                <a16:creationId xmlns:a16="http://schemas.microsoft.com/office/drawing/2014/main" id="{C3632A37-5E5D-B423-D098-83323F953049}"/>
+                <a16:creationId xmlns:a16="http://schemas.microsoft.com/office/drawing/2014/main" id="{06893245-1D26-A1AC-48AC-03ADA64A8262}"/>
               </a:ext>
             </a:extLst>
           </p:cNvPr>
@@ -1856,7 +1856,7 @@
           <p:cNvPr id="5" name="テキスト プレースホルダー 4">
             <a:extLst>
               <a:ext uri="{FF2B5EF4-FFF2-40B4-BE49-F238E27FC236}">
-                <a16:creationId xmlns:a16="http://schemas.microsoft.com/office/drawing/2014/main" id="{FC621D97-06B0-B466-1FAA-EE69878098D9}"/>
+                <a16:creationId xmlns:a16="http://schemas.microsoft.com/office/drawing/2014/main" id="{C07593CA-C2A3-72EA-25A9-D573E3C783BB}"/>
               </a:ext>
             </a:extLst>
           </p:cNvPr>
@@ -1927,7 +1927,7 @@
           <p:cNvPr id="6" name="コンテンツ プレースホルダー 5">
             <a:extLst>
               <a:ext uri="{FF2B5EF4-FFF2-40B4-BE49-F238E27FC236}">
-                <a16:creationId xmlns:a16="http://schemas.microsoft.com/office/drawing/2014/main" id="{A1BB388E-6228-1213-1C1E-26009762EC10}"/>
+                <a16:creationId xmlns:a16="http://schemas.microsoft.com/office/drawing/2014/main" id="{56E01810-EA49-8829-A85E-F7E299265C03}"/>
               </a:ext>
             </a:extLst>
           </p:cNvPr>
@@ -2021,7 +2021,7 @@
           <p:cNvPr id="7" name="日付プレースホルダー 6">
             <a:extLst>
               <a:ext uri="{FF2B5EF4-FFF2-40B4-BE49-F238E27FC236}">
-                <a16:creationId xmlns:a16="http://schemas.microsoft.com/office/drawing/2014/main" id="{C0279096-5D78-1B19-B145-A61EABBD0B45}"/>
+                <a16:creationId xmlns:a16="http://schemas.microsoft.com/office/drawing/2014/main" id="{B08AB1BE-B760-FBE5-422B-F398BE0F056C}"/>
               </a:ext>
             </a:extLst>
           </p:cNvPr>
@@ -2037,7 +2037,7 @@
           <a:bodyPr/>
           <a:lstStyle/>
           <a:p>
-            <a:fld id="{D3BEA99A-265A-4682-9AAB-F49FC7638CC9}" type="datetimeFigureOut">
+            <a:fld id="{8C02A746-D7BA-431B-A4C4-1A55AC47355C}" type="datetimeFigureOut">
               <a:rPr kumimoji="1" lang="ja-JP" altLang="en-US" smtClean="0"/>
               <a:t>2026/7/30</a:t>
             </a:fld>
@@ -2050,7 +2050,7 @@
           <p:cNvPr id="8" name="フッター プレースホルダー 7">
             <a:extLst>
               <a:ext uri="{FF2B5EF4-FFF2-40B4-BE49-F238E27FC236}">
-                <a16:creationId xmlns:a16="http://schemas.microsoft.com/office/drawing/2014/main" id="{DC937D42-36F8-8090-B323-5412154C16F8}"/>
+                <a16:creationId xmlns:a16="http://schemas.microsoft.com/office/drawing/2014/main" id="{BBF3C67D-BD65-06E4-EE99-C2DFB2E2114E}"/>
               </a:ext>
             </a:extLst>
           </p:cNvPr>
@@ -2075,7 +2075,7 @@
           <p:cNvPr id="9" name="スライド番号プレースホルダー 8">
             <a:extLst>
               <a:ext uri="{FF2B5EF4-FFF2-40B4-BE49-F238E27FC236}">
-                <a16:creationId xmlns:a16="http://schemas.microsoft.com/office/drawing/2014/main" id="{92B143AC-C9CB-3707-B4E1-5029579E1B11}"/>
+                <a16:creationId xmlns:a16="http://schemas.microsoft.com/office/drawing/2014/main" id="{2B1B3C5E-6CCA-7160-7BD0-877D41A70AA6}"/>
               </a:ext>
             </a:extLst>
           </p:cNvPr>
@@ -2091,7 +2091,7 @@
           <a:bodyPr/>
           <a:lstStyle/>
           <a:p>
-            <a:fld id="{F42F3BCE-466E-48CC-A1F6-C3CF3B61889B}" type="slidenum">
+            <a:fld id="{6F02A835-3153-418F-A232-3C66D7F83ED1}" type="slidenum">
               <a:rPr kumimoji="1" lang="ja-JP" altLang="en-US" smtClean="0"/>
               <a:t>‹#›</a:t>
             </a:fld>
@@ -2102,7 +2102,7 @@
     </p:spTree>
     <p:extLst>
       <p:ext uri="{BB962C8B-B14F-4D97-AF65-F5344CB8AC3E}">
-        <p14:creationId xmlns:p14="http://schemas.microsoft.com/office/powerpoint/2010/main" val="3600238319"/>
+        <p14:creationId xmlns:p14="http://schemas.microsoft.com/office/powerpoint/2010/main" val="648484815"/>
       </p:ext>
     </p:extLst>
   </p:cSld>
@@ -2134,7 +2134,7 @@
           <p:cNvPr id="2" name="タイトル 1">
             <a:extLst>
               <a:ext uri="{FF2B5EF4-FFF2-40B4-BE49-F238E27FC236}">
-                <a16:creationId xmlns:a16="http://schemas.microsoft.com/office/drawing/2014/main" id="{80A3B01B-C0B1-CD29-369B-572E8ED8F87D}"/>
+                <a16:creationId xmlns:a16="http://schemas.microsoft.com/office/drawing/2014/main" id="{E0F30CA1-060D-B25A-FDF3-B832BA4EC734}"/>
               </a:ext>
             </a:extLst>
           </p:cNvPr>
@@ -2162,7 +2162,7 @@
           <p:cNvPr id="3" name="日付プレースホルダー 2">
             <a:extLst>
               <a:ext uri="{FF2B5EF4-FFF2-40B4-BE49-F238E27FC236}">
-                <a16:creationId xmlns:a16="http://schemas.microsoft.com/office/drawing/2014/main" id="{65F1BF65-CA0D-AACA-D01F-662EB8E29AF6}"/>
+                <a16:creationId xmlns:a16="http://schemas.microsoft.com/office/drawing/2014/main" id="{9A1CF439-C6CB-C9E0-D3DE-076CD38B7A4A}"/>
               </a:ext>
             </a:extLst>
           </p:cNvPr>
@@ -2178,7 +2178,7 @@
           <a:bodyPr/>
           <a:lstStyle/>
           <a:p>
-            <a:fld id="{D3BEA99A-265A-4682-9AAB-F49FC7638CC9}" type="datetimeFigureOut">
+            <a:fld id="{8C02A746-D7BA-431B-A4C4-1A55AC47355C}" type="datetimeFigureOut">
               <a:rPr kumimoji="1" lang="ja-JP" altLang="en-US" smtClean="0"/>
               <a:t>2026/7/30</a:t>
             </a:fld>
@@ -2191,7 +2191,7 @@
           <p:cNvPr id="4" name="フッター プレースホルダー 3">
             <a:extLst>
               <a:ext uri="{FF2B5EF4-FFF2-40B4-BE49-F238E27FC236}">
-                <a16:creationId xmlns:a16="http://schemas.microsoft.com/office/drawing/2014/main" id="{F03121CD-91FD-024C-9A3B-472FDFA8897A}"/>
+                <a16:creationId xmlns:a16="http://schemas.microsoft.com/office/drawing/2014/main" id="{374A99B6-4429-4C42-49EF-8CE4798F33F9}"/>
               </a:ext>
             </a:extLst>
           </p:cNvPr>
@@ -2216,7 +2216,7 @@
           <p:cNvPr id="5" name="スライド番号プレースホルダー 4">
             <a:extLst>
               <a:ext uri="{FF2B5EF4-FFF2-40B4-BE49-F238E27FC236}">
-                <a16:creationId xmlns:a16="http://schemas.microsoft.com/office/drawing/2014/main" id="{4C4EDC82-AC01-38B1-3E31-E93C8E67A118}"/>
+                <a16:creationId xmlns:a16="http://schemas.microsoft.com/office/drawing/2014/main" id="{0943307E-B13F-E6AF-6C97-619DA377FD33}"/>
               </a:ext>
             </a:extLst>
           </p:cNvPr>
@@ -2232,7 +2232,7 @@
           <a:bodyPr/>
           <a:lstStyle/>
           <a:p>
-            <a:fld id="{F42F3BCE-466E-48CC-A1F6-C3CF3B61889B}" type="slidenum">
+            <a:fld id="{6F02A835-3153-418F-A232-3C66D7F83ED1}" type="slidenum">
               <a:rPr kumimoji="1" lang="ja-JP" altLang="en-US" smtClean="0"/>
               <a:t>‹#›</a:t>
             </a:fld>
@@ -2243,7 +2243,7 @@
     </p:spTree>
     <p:extLst>
       <p:ext uri="{BB962C8B-B14F-4D97-AF65-F5344CB8AC3E}">
-        <p14:creationId xmlns:p14="http://schemas.microsoft.com/office/powerpoint/2010/main" val="2491857849"/>
+        <p14:creationId xmlns:p14="http://schemas.microsoft.com/office/powerpoint/2010/main" val="3315411796"/>
       </p:ext>
     </p:extLst>
   </p:cSld>
@@ -2275,7 +2275,7 @@
           <p:cNvPr id="2" name="日付プレースホルダー 1">
             <a:extLst>
               <a:ext uri="{FF2B5EF4-FFF2-40B4-BE49-F238E27FC236}">
-                <a16:creationId xmlns:a16="http://schemas.microsoft.com/office/drawing/2014/main" id="{892BAABC-B19A-11A0-3BC0-D7E3D7B0083E}"/>
+                <a16:creationId xmlns:a16="http://schemas.microsoft.com/office/drawing/2014/main" id="{D224A407-157A-3DE5-695E-C6D7E3257F1C}"/>
               </a:ext>
             </a:extLst>
           </p:cNvPr>
@@ -2291,7 +2291,7 @@
           <a:bodyPr/>
           <a:lstStyle/>
           <a:p>
-            <a:fld id="{D3BEA99A-265A-4682-9AAB-F49FC7638CC9}" type="datetimeFigureOut">
+            <a:fld id="{8C02A746-D7BA-431B-A4C4-1A55AC47355C}" type="datetimeFigureOut">
               <a:rPr kumimoji="1" lang="ja-JP" altLang="en-US" smtClean="0"/>
               <a:t>2026/7/30</a:t>
             </a:fld>
@@ -2304,7 +2304,7 @@
           <p:cNvPr id="3" name="フッター プレースホルダー 2">
             <a:extLst>
               <a:ext uri="{FF2B5EF4-FFF2-40B4-BE49-F238E27FC236}">
-                <a16:creationId xmlns:a16="http://schemas.microsoft.com/office/drawing/2014/main" id="{682644EB-F01E-B0C6-FA64-A5C3FCBC3BD7}"/>
+                <a16:creationId xmlns:a16="http://schemas.microsoft.com/office/drawing/2014/main" id="{C0729A3A-6647-4949-A3A9-539B1BB599EA}"/>
               </a:ext>
             </a:extLst>
           </p:cNvPr>
@@ -2329,7 +2329,7 @@
           <p:cNvPr id="4" name="スライド番号プレースホルダー 3">
             <a:extLst>
               <a:ext uri="{FF2B5EF4-FFF2-40B4-BE49-F238E27FC236}">
-                <a16:creationId xmlns:a16="http://schemas.microsoft.com/office/drawing/2014/main" id="{BE14618E-9326-9815-A4DE-3F3D29AC0A59}"/>
+                <a16:creationId xmlns:a16="http://schemas.microsoft.com/office/drawing/2014/main" id="{21662443-66AC-F530-8CC4-BCF7D0AD0C98}"/>
               </a:ext>
             </a:extLst>
           </p:cNvPr>
@@ -2345,7 +2345,7 @@
           <a:bodyPr/>
           <a:lstStyle/>
           <a:p>
-            <a:fld id="{F42F3BCE-466E-48CC-A1F6-C3CF3B61889B}" type="slidenum">
+            <a:fld id="{6F02A835-3153-418F-A232-3C66D7F83ED1}" type="slidenum">
               <a:rPr kumimoji="1" lang="ja-JP" altLang="en-US" smtClean="0"/>
               <a:t>‹#›</a:t>
             </a:fld>
@@ -2356,7 +2356,7 @@
     </p:spTree>
     <p:extLst>
       <p:ext uri="{BB962C8B-B14F-4D97-AF65-F5344CB8AC3E}">
-        <p14:creationId xmlns:p14="http://schemas.microsoft.com/office/powerpoint/2010/main" val="1792571425"/>
+        <p14:creationId xmlns:p14="http://schemas.microsoft.com/office/powerpoint/2010/main" val="3133020158"/>
       </p:ext>
     </p:extLst>
   </p:cSld>
@@ -2388,7 +2388,7 @@
           <p:cNvPr id="2" name="タイトル 1">
             <a:extLst>
               <a:ext uri="{FF2B5EF4-FFF2-40B4-BE49-F238E27FC236}">
-                <a16:creationId xmlns:a16="http://schemas.microsoft.com/office/drawing/2014/main" id="{5DB2D68C-CF97-DA29-8CBF-129E751B71C0}"/>
+                <a16:creationId xmlns:a16="http://schemas.microsoft.com/office/drawing/2014/main" id="{7848CFCD-1ED2-C47A-C563-DC681C960D6A}"/>
               </a:ext>
             </a:extLst>
           </p:cNvPr>
@@ -2425,7 +2425,7 @@
           <p:cNvPr id="3" name="コンテンツ プレースホルダー 2">
             <a:extLst>
               <a:ext uri="{FF2B5EF4-FFF2-40B4-BE49-F238E27FC236}">
-                <a16:creationId xmlns:a16="http://schemas.microsoft.com/office/drawing/2014/main" id="{E09DE754-D21D-4AEE-0059-55A9C23243F5}"/>
+                <a16:creationId xmlns:a16="http://schemas.microsoft.com/office/drawing/2014/main" id="{C51475A3-38A5-E3D6-BE7D-E6F5B047B69F}"/>
               </a:ext>
             </a:extLst>
           </p:cNvPr>
@@ -2547,7 +2547,7 @@
           <p:cNvPr id="4" name="テキスト プレースホルダー 3">
             <a:extLst>
               <a:ext uri="{FF2B5EF4-FFF2-40B4-BE49-F238E27FC236}">
-                <a16:creationId xmlns:a16="http://schemas.microsoft.com/office/drawing/2014/main" id="{310B0423-C81F-EF83-0C9F-B46916C7BAFF}"/>
+                <a16:creationId xmlns:a16="http://schemas.microsoft.com/office/drawing/2014/main" id="{29856276-19F5-E988-D058-F619DB8A5F25}"/>
               </a:ext>
             </a:extLst>
           </p:cNvPr>
@@ -2618,7 +2618,7 @@
           <p:cNvPr id="5" name="日付プレースホルダー 4">
             <a:extLst>
               <a:ext uri="{FF2B5EF4-FFF2-40B4-BE49-F238E27FC236}">
-                <a16:creationId xmlns:a16="http://schemas.microsoft.com/office/drawing/2014/main" id="{B63D8D67-58A6-1F24-C996-7B2768DAEE26}"/>
+                <a16:creationId xmlns:a16="http://schemas.microsoft.com/office/drawing/2014/main" id="{5C63E509-70C6-5EF3-CA6E-1C9F1667DF20}"/>
               </a:ext>
             </a:extLst>
           </p:cNvPr>
@@ -2634,7 +2634,7 @@
           <a:bodyPr/>
           <a:lstStyle/>
           <a:p>
-            <a:fld id="{D3BEA99A-265A-4682-9AAB-F49FC7638CC9}" type="datetimeFigureOut">
+            <a:fld id="{8C02A746-D7BA-431B-A4C4-1A55AC47355C}" type="datetimeFigureOut">
               <a:rPr kumimoji="1" lang="ja-JP" altLang="en-US" smtClean="0"/>
               <a:t>2026/7/30</a:t>
             </a:fld>
@@ -2647,7 +2647,7 @@
           <p:cNvPr id="6" name="フッター プレースホルダー 5">
             <a:extLst>
               <a:ext uri="{FF2B5EF4-FFF2-40B4-BE49-F238E27FC236}">
-                <a16:creationId xmlns:a16="http://schemas.microsoft.com/office/drawing/2014/main" id="{F7FD10B9-DD16-1C48-B6C1-19143B8D9661}"/>
+                <a16:creationId xmlns:a16="http://schemas.microsoft.com/office/drawing/2014/main" id="{86BADF6E-B325-FFF5-7CD4-CD93D4E7B8AF}"/>
               </a:ext>
             </a:extLst>
           </p:cNvPr>
@@ -2672,7 +2672,7 @@
           <p:cNvPr id="7" name="スライド番号プレースホルダー 6">
             <a:extLst>
               <a:ext uri="{FF2B5EF4-FFF2-40B4-BE49-F238E27FC236}">
-                <a16:creationId xmlns:a16="http://schemas.microsoft.com/office/drawing/2014/main" id="{1581B0B1-B3E0-B284-0AF6-7910AF0C765B}"/>
+                <a16:creationId xmlns:a16="http://schemas.microsoft.com/office/drawing/2014/main" id="{6DBB962F-FAA6-9478-61EA-1EF89FC17174}"/>
               </a:ext>
             </a:extLst>
           </p:cNvPr>
@@ -2688,7 +2688,7 @@
           <a:bodyPr/>
           <a:lstStyle/>
           <a:p>
-            <a:fld id="{F42F3BCE-466E-48CC-A1F6-C3CF3B61889B}" type="slidenum">
+            <a:fld id="{6F02A835-3153-418F-A232-3C66D7F83ED1}" type="slidenum">
               <a:rPr kumimoji="1" lang="ja-JP" altLang="en-US" smtClean="0"/>
               <a:t>‹#›</a:t>
             </a:fld>
@@ -2699,7 +2699,7 @@
     </p:spTree>
     <p:extLst>
       <p:ext uri="{BB962C8B-B14F-4D97-AF65-F5344CB8AC3E}">
-        <p14:creationId xmlns:p14="http://schemas.microsoft.com/office/powerpoint/2010/main" val="1096153200"/>
+        <p14:creationId xmlns:p14="http://schemas.microsoft.com/office/powerpoint/2010/main" val="577620401"/>
       </p:ext>
     </p:extLst>
   </p:cSld>
@@ -2731,7 +2731,7 @@
           <p:cNvPr id="2" name="タイトル 1">
             <a:extLst>
               <a:ext uri="{FF2B5EF4-FFF2-40B4-BE49-F238E27FC236}">
-                <a16:creationId xmlns:a16="http://schemas.microsoft.com/office/drawing/2014/main" id="{3E967516-B741-23D8-CF50-94D983A32EEA}"/>
+                <a16:creationId xmlns:a16="http://schemas.microsoft.com/office/drawing/2014/main" id="{94C02A0B-FE0B-ED5C-0BCD-44E9281EDBCB}"/>
               </a:ext>
             </a:extLst>
           </p:cNvPr>
@@ -2768,7 +2768,7 @@
           <p:cNvPr id="3" name="図プレースホルダー 2">
             <a:extLst>
               <a:ext uri="{FF2B5EF4-FFF2-40B4-BE49-F238E27FC236}">
-                <a16:creationId xmlns:a16="http://schemas.microsoft.com/office/drawing/2014/main" id="{25682208-80B7-9959-3F97-5758D01F9A4A}"/>
+                <a16:creationId xmlns:a16="http://schemas.microsoft.com/office/drawing/2014/main" id="{479B81AA-6128-7913-8EF5-EF4975202315}"/>
               </a:ext>
             </a:extLst>
           </p:cNvPr>
@@ -2835,7 +2835,7 @@
           <p:cNvPr id="4" name="テキスト プレースホルダー 3">
             <a:extLst>
               <a:ext uri="{FF2B5EF4-FFF2-40B4-BE49-F238E27FC236}">
-                <a16:creationId xmlns:a16="http://schemas.microsoft.com/office/drawing/2014/main" id="{1FF17D17-AA00-D542-B9DB-85A3FCD2CD8B}"/>
+                <a16:creationId xmlns:a16="http://schemas.microsoft.com/office/drawing/2014/main" id="{3A60C79F-4352-E886-4888-69C04C97D124}"/>
               </a:ext>
             </a:extLst>
           </p:cNvPr>
@@ -2906,7 +2906,7 @@
           <p:cNvPr id="5" name="日付プレースホルダー 4">
             <a:extLst>
               <a:ext uri="{FF2B5EF4-FFF2-40B4-BE49-F238E27FC236}">
-                <a16:creationId xmlns:a16="http://schemas.microsoft.com/office/drawing/2014/main" id="{6AB15AA1-2EFA-EE16-AD9D-15B3076906AE}"/>
+                <a16:creationId xmlns:a16="http://schemas.microsoft.com/office/drawing/2014/main" id="{66DCB005-8BDF-86C5-64C8-55EEF10E01C7}"/>
               </a:ext>
             </a:extLst>
           </p:cNvPr>
@@ -2922,7 +2922,7 @@
           <a:bodyPr/>
           <a:lstStyle/>
           <a:p>
-            <a:fld id="{D3BEA99A-265A-4682-9AAB-F49FC7638CC9}" type="datetimeFigureOut">
+            <a:fld id="{8C02A746-D7BA-431B-A4C4-1A55AC47355C}" type="datetimeFigureOut">
               <a:rPr kumimoji="1" lang="ja-JP" altLang="en-US" smtClean="0"/>
               <a:t>2026/7/30</a:t>
             </a:fld>
@@ -2935,7 +2935,7 @@
           <p:cNvPr id="6" name="フッター プレースホルダー 5">
             <a:extLst>
               <a:ext uri="{FF2B5EF4-FFF2-40B4-BE49-F238E27FC236}">
-                <a16:creationId xmlns:a16="http://schemas.microsoft.com/office/drawing/2014/main" id="{773739B7-7220-4DAA-8816-751C58AAAF23}"/>
+                <a16:creationId xmlns:a16="http://schemas.microsoft.com/office/drawing/2014/main" id="{AA935876-9A10-C9B1-DB84-AE360833DD9C}"/>
               </a:ext>
             </a:extLst>
           </p:cNvPr>
@@ -2960,7 +2960,7 @@
           <p:cNvPr id="7" name="スライド番号プレースホルダー 6">
             <a:extLst>
               <a:ext uri="{FF2B5EF4-FFF2-40B4-BE49-F238E27FC236}">
-                <a16:creationId xmlns:a16="http://schemas.microsoft.com/office/drawing/2014/main" id="{82846A2B-E06F-120B-6DF6-53B5720A7EF4}"/>
+                <a16:creationId xmlns:a16="http://schemas.microsoft.com/office/drawing/2014/main" id="{49CFD8BF-5D3B-D8BC-B38E-39BCAE219129}"/>
               </a:ext>
             </a:extLst>
           </p:cNvPr>
@@ -2976,7 +2976,7 @@
           <a:bodyPr/>
           <a:lstStyle/>
           <a:p>
-            <a:fld id="{F42F3BCE-466E-48CC-A1F6-C3CF3B61889B}" type="slidenum">
+            <a:fld id="{6F02A835-3153-418F-A232-3C66D7F83ED1}" type="slidenum">
               <a:rPr kumimoji="1" lang="ja-JP" altLang="en-US" smtClean="0"/>
               <a:t>‹#›</a:t>
             </a:fld>
@@ -2987,7 +2987,7 @@
     </p:spTree>
     <p:extLst>
       <p:ext uri="{BB962C8B-B14F-4D97-AF65-F5344CB8AC3E}">
-        <p14:creationId xmlns:p14="http://schemas.microsoft.com/office/powerpoint/2010/main" val="1312501145"/>
+        <p14:creationId xmlns:p14="http://schemas.microsoft.com/office/powerpoint/2010/main" val="1719228914"/>
       </p:ext>
     </p:extLst>
   </p:cSld>
@@ -3024,7 +3024,7 @@
           <p:cNvPr id="2" name="タイトル プレースホルダー 1">
             <a:extLst>
               <a:ext uri="{FF2B5EF4-FFF2-40B4-BE49-F238E27FC236}">
-                <a16:creationId xmlns:a16="http://schemas.microsoft.com/office/drawing/2014/main" id="{33685728-8571-1807-3FC3-9BF16CAAAE59}"/>
+                <a16:creationId xmlns:a16="http://schemas.microsoft.com/office/drawing/2014/main" id="{37CC9AED-A9D5-D229-9C26-DEE7E58FCB02}"/>
               </a:ext>
             </a:extLst>
           </p:cNvPr>
@@ -3062,7 +3062,7 @@
           <p:cNvPr id="3" name="テキスト プレースホルダー 2">
             <a:extLst>
               <a:ext uri="{FF2B5EF4-FFF2-40B4-BE49-F238E27FC236}">
-                <a16:creationId xmlns:a16="http://schemas.microsoft.com/office/drawing/2014/main" id="{442E0CCF-EBFF-4922-DEFA-B6886D15E3D3}"/>
+                <a16:creationId xmlns:a16="http://schemas.microsoft.com/office/drawing/2014/main" id="{4B34D2D1-ED1F-C4FB-879B-37782828FB03}"/>
               </a:ext>
             </a:extLst>
           </p:cNvPr>
@@ -3161,7 +3161,7 @@
           <p:cNvPr id="4" name="日付プレースホルダー 3">
             <a:extLst>
               <a:ext uri="{FF2B5EF4-FFF2-40B4-BE49-F238E27FC236}">
-                <a16:creationId xmlns:a16="http://schemas.microsoft.com/office/drawing/2014/main" id="{928724DA-354D-B734-A4B3-6D09BA63E46E}"/>
+                <a16:creationId xmlns:a16="http://schemas.microsoft.com/office/drawing/2014/main" id="{C28E6869-EFC8-1B8A-2387-DB2F1945FBEB}"/>
               </a:ext>
             </a:extLst>
           </p:cNvPr>
@@ -3195,7 +3195,7 @@
             </a:lvl1pPr>
           </a:lstStyle>
           <a:p>
-            <a:fld id="{D3BEA99A-265A-4682-9AAB-F49FC7638CC9}" type="datetimeFigureOut">
+            <a:fld id="{8C02A746-D7BA-431B-A4C4-1A55AC47355C}" type="datetimeFigureOut">
               <a:rPr kumimoji="1" lang="ja-JP" altLang="en-US" smtClean="0"/>
               <a:t>2026/7/30</a:t>
             </a:fld>
@@ -3208,7 +3208,7 @@
           <p:cNvPr id="5" name="フッター プレースホルダー 4">
             <a:extLst>
               <a:ext uri="{FF2B5EF4-FFF2-40B4-BE49-F238E27FC236}">
-                <a16:creationId xmlns:a16="http://schemas.microsoft.com/office/drawing/2014/main" id="{38E993E1-EC12-2946-4DA0-D50532A750C0}"/>
+                <a16:creationId xmlns:a16="http://schemas.microsoft.com/office/drawing/2014/main" id="{321A2B18-B783-FD63-CECB-A4E8EDCEFEEB}"/>
               </a:ext>
             </a:extLst>
           </p:cNvPr>
@@ -3251,7 +3251,7 @@
           <p:cNvPr id="6" name="スライド番号プレースホルダー 5">
             <a:extLst>
               <a:ext uri="{FF2B5EF4-FFF2-40B4-BE49-F238E27FC236}">
-                <a16:creationId xmlns:a16="http://schemas.microsoft.com/office/drawing/2014/main" id="{A5641836-55CE-2D63-B171-7501EDC911A9}"/>
+                <a16:creationId xmlns:a16="http://schemas.microsoft.com/office/drawing/2014/main" id="{8B4BBE5D-52AB-07E4-883F-EAE4F8BF42B9}"/>
               </a:ext>
             </a:extLst>
           </p:cNvPr>
@@ -3285,7 +3285,7 @@
             </a:lvl1pPr>
           </a:lstStyle>
           <a:p>
-            <a:fld id="{F42F3BCE-466E-48CC-A1F6-C3CF3B61889B}" type="slidenum">
+            <a:fld id="{6F02A835-3153-418F-A232-3C66D7F83ED1}" type="slidenum">
               <a:rPr kumimoji="1" lang="ja-JP" altLang="en-US" smtClean="0"/>
               <a:t>‹#›</a:t>
             </a:fld>
@@ -3296,7 +3296,7 @@
     </p:spTree>
     <p:extLst>
       <p:ext uri="{BB962C8B-B14F-4D97-AF65-F5344CB8AC3E}">
-        <p14:creationId xmlns:p14="http://schemas.microsoft.com/office/powerpoint/2010/main" val="1142196132"/>
+        <p14:creationId xmlns:p14="http://schemas.microsoft.com/office/powerpoint/2010/main" val="3741111784"/>
       </p:ext>
     </p:extLst>
   </p:cSld>
@@ -3619,7 +3619,7 @@
           <p:cNvPr id="2" name="テキスト ボックス 1">
             <a:extLst>
               <a:ext uri="{FF2B5EF4-FFF2-40B4-BE49-F238E27FC236}">
-                <a16:creationId xmlns:a16="http://schemas.microsoft.com/office/drawing/2014/main" id="{0AE93904-CB89-8728-D4F9-ECB8AD294707}"/>
+                <a16:creationId xmlns:a16="http://schemas.microsoft.com/office/drawing/2014/main" id="{ABE85CF0-E6C5-4ECF-3912-7DEEA44EEAC3}"/>
               </a:ext>
             </a:extLst>
           </p:cNvPr>
@@ -3665,7 +3665,7 @@
           <p:cNvPr id="3" name="テキスト ボックス 2">
             <a:extLst>
               <a:ext uri="{FF2B5EF4-FFF2-40B4-BE49-F238E27FC236}">
-                <a16:creationId xmlns:a16="http://schemas.microsoft.com/office/drawing/2014/main" id="{69B8A9ED-5A86-0A1B-C7DF-5A66446DA3FA}"/>
+                <a16:creationId xmlns:a16="http://schemas.microsoft.com/office/drawing/2014/main" id="{CF4C1CD7-8411-12CF-B33E-994C8D4DFD92}"/>
               </a:ext>
             </a:extLst>
           </p:cNvPr>
@@ -3714,7 +3714,7 @@
           <p:cNvPr id="4" name="テキスト ボックス 3">
             <a:extLst>
               <a:ext uri="{FF2B5EF4-FFF2-40B4-BE49-F238E27FC236}">
-                <a16:creationId xmlns:a16="http://schemas.microsoft.com/office/drawing/2014/main" id="{3175750F-1717-3765-C2B9-1B588F03DD5E}"/>
+                <a16:creationId xmlns:a16="http://schemas.microsoft.com/office/drawing/2014/main" id="{B1AD8E44-2A4F-1AC2-8254-738963F9A315}"/>
               </a:ext>
             </a:extLst>
           </p:cNvPr>
@@ -3754,7 +3754,7 @@
           <p:cNvPr id="5" name="テキスト ボックス 4">
             <a:extLst>
               <a:ext uri="{FF2B5EF4-FFF2-40B4-BE49-F238E27FC236}">
-                <a16:creationId xmlns:a16="http://schemas.microsoft.com/office/drawing/2014/main" id="{D42F11C3-76FC-ECA8-BF45-E4AF1D17D50F}"/>
+                <a16:creationId xmlns:a16="http://schemas.microsoft.com/office/drawing/2014/main" id="{506F4BBE-84E0-A093-BF2C-8BD767201FFF}"/>
               </a:ext>
             </a:extLst>
           </p:cNvPr>
@@ -3801,7 +3801,7 @@
             <a:hlinkClick r:id="" action="ppaction://media"/>
             <a:extLst>
               <a:ext uri="{FF2B5EF4-FFF2-40B4-BE49-F238E27FC236}">
-                <a16:creationId xmlns:a16="http://schemas.microsoft.com/office/drawing/2014/main" id="{49C0592B-42FB-78BB-5069-B5ED58852E87}"/>
+                <a16:creationId xmlns:a16="http://schemas.microsoft.com/office/drawing/2014/main" id="{ED6149C1-1B94-63B9-6BB3-3C54E5E4D0B9}"/>
               </a:ext>
             </a:extLst>
           </p:cNvPr>
@@ -3836,7 +3836,7 @@
     </p:spTree>
     <p:extLst>
       <p:ext uri="{BB962C8B-B14F-4D97-AF65-F5344CB8AC3E}">
-        <p14:creationId xmlns:p14="http://schemas.microsoft.com/office/powerpoint/2010/main" val="2235706515"/>
+        <p14:creationId xmlns:p14="http://schemas.microsoft.com/office/powerpoint/2010/main" val="3403832776"/>
       </p:ext>
     </p:extLst>
   </p:cSld>
@@ -3960,7 +3960,7 @@
           <p:cNvPr id="2" name="テキスト ボックス 1">
             <a:extLst>
               <a:ext uri="{FF2B5EF4-FFF2-40B4-BE49-F238E27FC236}">
-                <a16:creationId xmlns:a16="http://schemas.microsoft.com/office/drawing/2014/main" id="{F79396C8-4EA2-7E95-8FED-108475901B8E}"/>
+                <a16:creationId xmlns:a16="http://schemas.microsoft.com/office/drawing/2014/main" id="{D8A2F879-5945-73DA-4948-29DCAA1F72F8}"/>
               </a:ext>
             </a:extLst>
           </p:cNvPr>
@@ -4006,7 +4006,7 @@
           <p:cNvPr id="3" name="テキスト ボックス 2">
             <a:extLst>
               <a:ext uri="{FF2B5EF4-FFF2-40B4-BE49-F238E27FC236}">
-                <a16:creationId xmlns:a16="http://schemas.microsoft.com/office/drawing/2014/main" id="{641EC577-4743-A3FB-B011-B96D794EAAEC}"/>
+                <a16:creationId xmlns:a16="http://schemas.microsoft.com/office/drawing/2014/main" id="{F61E2905-81B6-C1C5-9CCC-5140EE121C0C}"/>
               </a:ext>
             </a:extLst>
           </p:cNvPr>
@@ -4046,7 +4046,7 @@
           <p:cNvPr id="4" name="テキスト ボックス 3">
             <a:extLst>
               <a:ext uri="{FF2B5EF4-FFF2-40B4-BE49-F238E27FC236}">
-                <a16:creationId xmlns:a16="http://schemas.microsoft.com/office/drawing/2014/main" id="{B4433D79-133D-5BBE-72F3-334AB8DD900E}"/>
+                <a16:creationId xmlns:a16="http://schemas.microsoft.com/office/drawing/2014/main" id="{87491DB0-F0DA-DF94-CFA7-B80F179DE46B}"/>
               </a:ext>
             </a:extLst>
           </p:cNvPr>
@@ -4076,14 +4076,17 @@
                 </a:solidFill>
                 <a:latin typeface="Arial" panose="020B0604020202020204" pitchFamily="34" charset="0"/>
               </a:rPr>
-              <a:t>About Laravel Laravel is a web application framework with expressive, elegant syntax</a:t>
-            </a:r>
-            <a:endParaRPr kumimoji="1" lang="ja-JP" altLang="en-US" sz="2000">
-              <a:solidFill>
-                <a:srgbClr val="333333"/>
-              </a:solidFill>
-              <a:latin typeface="Arial" panose="020B0604020202020204" pitchFamily="34" charset="0"/>
-            </a:endParaRPr>
+              <a:t>Juku Map</a:t>
+            </a:r>
+            <a:r>
+              <a:rPr kumimoji="1" lang="ja-JP" altLang="en-US" sz="2000">
+                <a:solidFill>
+                  <a:srgbClr val="333333"/>
+                </a:solidFill>
+                <a:latin typeface="Arial" panose="020B0604020202020204" pitchFamily="34" charset="0"/>
+              </a:rPr>
+              <a:t>の目的、構成、実装を公開コードから確認できるプロジェクトです。</a:t>
+            </a:r>
           </a:p>
         </p:txBody>
       </p:sp>
@@ -4092,7 +4095,7 @@
           <p:cNvPr id="5" name="テキスト ボックス 4">
             <a:extLst>
               <a:ext uri="{FF2B5EF4-FFF2-40B4-BE49-F238E27FC236}">
-                <a16:creationId xmlns:a16="http://schemas.microsoft.com/office/drawing/2014/main" id="{89B221BF-4CFB-0CE4-A357-FE676D93290C}"/>
+                <a16:creationId xmlns:a16="http://schemas.microsoft.com/office/drawing/2014/main" id="{9521E49C-A154-63D1-8D0C-EF3BD77646CC}"/>
               </a:ext>
             </a:extLst>
           </p:cNvPr>
@@ -4139,7 +4142,7 @@
             <a:hlinkClick r:id="" action="ppaction://media"/>
             <a:extLst>
               <a:ext uri="{FF2B5EF4-FFF2-40B4-BE49-F238E27FC236}">
-                <a16:creationId xmlns:a16="http://schemas.microsoft.com/office/drawing/2014/main" id="{BA2D149E-1C99-23DE-9299-8E40B5118861}"/>
+                <a16:creationId xmlns:a16="http://schemas.microsoft.com/office/drawing/2014/main" id="{8561EC02-D786-FB9B-7340-5EF9786C9F9D}"/>
               </a:ext>
             </a:extLst>
           </p:cNvPr>
@@ -4174,7 +4177,7 @@
     </p:spTree>
     <p:extLst>
       <p:ext uri="{BB962C8B-B14F-4D97-AF65-F5344CB8AC3E}">
-        <p14:creationId xmlns:p14="http://schemas.microsoft.com/office/powerpoint/2010/main" val="4197915637"/>
+        <p14:creationId xmlns:p14="http://schemas.microsoft.com/office/powerpoint/2010/main" val="3386653088"/>
       </p:ext>
     </p:extLst>
   </p:cSld>
@@ -4183,10 +4186,10 @@
   </p:clrMapOvr>
   <mc:AlternateContent xmlns:mc="http://schemas.openxmlformats.org/markup-compatibility/2006">
     <mc:Choice xmlns:p14="http://schemas.microsoft.com/office/powerpoint/2010/main" Requires="p14">
-      <p:transition spd="slow" p14:dur="2000" advTm="8000"/>
+      <p:transition spd="slow" p14:dur="2000" advTm="7000"/>
     </mc:Choice>
     <mc:Fallback>
-      <p:transition spd="slow" advTm="8000"/>
+      <p:transition spd="slow" advTm="7000"/>
     </mc:Fallback>
   </mc:AlternateContent>
   <p:timing>
@@ -4217,7 +4220,7 @@
                                   <p:childTnLst>
                                     <p:cmd type="call" cmd="playFrom(0.0)">
                                       <p:cBhvr>
-                                        <p:cTn id="6" dur="7780" fill="hold"/>
+                                        <p:cTn id="6" dur="6872" fill="hold"/>
                                         <p:tgtEl>
                                           <p:spTgt spid="6"/>
                                         </p:tgtEl>
@@ -4298,7 +4301,7 @@
           <p:cNvPr id="2" name="テキスト ボックス 1">
             <a:extLst>
               <a:ext uri="{FF2B5EF4-FFF2-40B4-BE49-F238E27FC236}">
-                <a16:creationId xmlns:a16="http://schemas.microsoft.com/office/drawing/2014/main" id="{BAE309E0-49A8-01BE-6B1B-3E08EAB0610B}"/>
+                <a16:creationId xmlns:a16="http://schemas.microsoft.com/office/drawing/2014/main" id="{6433FC6F-4BB2-53F2-AD34-DC396071FCBB}"/>
               </a:ext>
             </a:extLst>
           </p:cNvPr>
@@ -4344,7 +4347,7 @@
           <p:cNvPr id="3" name="テキスト ボックス 2">
             <a:extLst>
               <a:ext uri="{FF2B5EF4-FFF2-40B4-BE49-F238E27FC236}">
-                <a16:creationId xmlns:a16="http://schemas.microsoft.com/office/drawing/2014/main" id="{F8271576-DAF8-113E-FFBC-235C6F5B53FF}"/>
+                <a16:creationId xmlns:a16="http://schemas.microsoft.com/office/drawing/2014/main" id="{4997263F-D62D-CAD2-BF2C-D4994C890AD2}"/>
               </a:ext>
             </a:extLst>
           </p:cNvPr>
@@ -4384,7 +4387,7 @@
           <p:cNvPr id="4" name="テキスト ボックス 3">
             <a:extLst>
               <a:ext uri="{FF2B5EF4-FFF2-40B4-BE49-F238E27FC236}">
-                <a16:creationId xmlns:a16="http://schemas.microsoft.com/office/drawing/2014/main" id="{CD4981D7-A87D-1071-86C6-0B0DCFF4AC66}"/>
+                <a16:creationId xmlns:a16="http://schemas.microsoft.com/office/drawing/2014/main" id="{9DCD4DFC-14A3-90AC-78D3-74834582AA4F}"/>
               </a:ext>
             </a:extLst>
           </p:cNvPr>
@@ -4497,7 +4500,7 @@
           <p:cNvPr id="5" name="テキスト ボックス 4">
             <a:extLst>
               <a:ext uri="{FF2B5EF4-FFF2-40B4-BE49-F238E27FC236}">
-                <a16:creationId xmlns:a16="http://schemas.microsoft.com/office/drawing/2014/main" id="{9549E469-089C-27F0-D561-915FC4E61812}"/>
+                <a16:creationId xmlns:a16="http://schemas.microsoft.com/office/drawing/2014/main" id="{F05B7AC8-ABC9-5783-F490-136B542825E2}"/>
               </a:ext>
             </a:extLst>
           </p:cNvPr>
@@ -4544,7 +4547,7 @@
             <a:hlinkClick r:id="" action="ppaction://media"/>
             <a:extLst>
               <a:ext uri="{FF2B5EF4-FFF2-40B4-BE49-F238E27FC236}">
-                <a16:creationId xmlns:a16="http://schemas.microsoft.com/office/drawing/2014/main" id="{272320EF-D0F0-A538-BDD5-30132E263279}"/>
+                <a16:creationId xmlns:a16="http://schemas.microsoft.com/office/drawing/2014/main" id="{BB075D20-2402-307B-D6CE-43C8A7954C11}"/>
               </a:ext>
             </a:extLst>
           </p:cNvPr>
@@ -4579,7 +4582,7 @@
     </p:spTree>
     <p:extLst>
       <p:ext uri="{BB962C8B-B14F-4D97-AF65-F5344CB8AC3E}">
-        <p14:creationId xmlns:p14="http://schemas.microsoft.com/office/powerpoint/2010/main" val="3896917489"/>
+        <p14:creationId xmlns:p14="http://schemas.microsoft.com/office/powerpoint/2010/main" val="3212283658"/>
       </p:ext>
     </p:extLst>
   </p:cSld>
@@ -4703,7 +4706,7 @@
           <p:cNvPr id="2" name="テキスト ボックス 1">
             <a:extLst>
               <a:ext uri="{FF2B5EF4-FFF2-40B4-BE49-F238E27FC236}">
-                <a16:creationId xmlns:a16="http://schemas.microsoft.com/office/drawing/2014/main" id="{A5724820-3DCC-45E8-EA59-924D0601DD8E}"/>
+                <a16:creationId xmlns:a16="http://schemas.microsoft.com/office/drawing/2014/main" id="{F448F178-E6A8-95CB-D73C-08C4F3985989}"/>
               </a:ext>
             </a:extLst>
           </p:cNvPr>
@@ -4749,7 +4752,7 @@
           <p:cNvPr id="3" name="テキスト ボックス 2">
             <a:extLst>
               <a:ext uri="{FF2B5EF4-FFF2-40B4-BE49-F238E27FC236}">
-                <a16:creationId xmlns:a16="http://schemas.microsoft.com/office/drawing/2014/main" id="{E258C019-1088-2BF1-8A64-2EB2123697DB}"/>
+                <a16:creationId xmlns:a16="http://schemas.microsoft.com/office/drawing/2014/main" id="{6ADB95DF-4650-9573-8808-CA8123270673}"/>
               </a:ext>
             </a:extLst>
           </p:cNvPr>
@@ -4789,7 +4792,7 @@
           <p:cNvPr id="4" name="テキスト ボックス 3">
             <a:extLst>
               <a:ext uri="{FF2B5EF4-FFF2-40B4-BE49-F238E27FC236}">
-                <a16:creationId xmlns:a16="http://schemas.microsoft.com/office/drawing/2014/main" id="{3C6DFBA9-87B9-0349-562A-AA37707DF00C}"/>
+                <a16:creationId xmlns:a16="http://schemas.microsoft.com/office/drawing/2014/main" id="{23956F65-58CA-DA64-CC57-45B4B917BC3F}"/>
               </a:ext>
             </a:extLst>
           </p:cNvPr>
@@ -4899,7 +4902,7 @@
           <p:cNvPr id="5" name="テキスト ボックス 4">
             <a:extLst>
               <a:ext uri="{FF2B5EF4-FFF2-40B4-BE49-F238E27FC236}">
-                <a16:creationId xmlns:a16="http://schemas.microsoft.com/office/drawing/2014/main" id="{38704326-EBC4-26FF-98FF-4AB70154C9DB}"/>
+                <a16:creationId xmlns:a16="http://schemas.microsoft.com/office/drawing/2014/main" id="{AC7A0DF8-9CD7-917A-6E84-E080E66B78A8}"/>
               </a:ext>
             </a:extLst>
           </p:cNvPr>
@@ -4946,7 +4949,7 @@
             <a:hlinkClick r:id="" action="ppaction://media"/>
             <a:extLst>
               <a:ext uri="{FF2B5EF4-FFF2-40B4-BE49-F238E27FC236}">
-                <a16:creationId xmlns:a16="http://schemas.microsoft.com/office/drawing/2014/main" id="{49379B3D-EAC9-41EA-1D57-6EDD2E1B5500}"/>
+                <a16:creationId xmlns:a16="http://schemas.microsoft.com/office/drawing/2014/main" id="{ADEA1D25-1111-EDAA-D0AA-11256F6D8280}"/>
               </a:ext>
             </a:extLst>
           </p:cNvPr>
@@ -4981,7 +4984,7 @@
     </p:spTree>
     <p:extLst>
       <p:ext uri="{BB962C8B-B14F-4D97-AF65-F5344CB8AC3E}">
-        <p14:creationId xmlns:p14="http://schemas.microsoft.com/office/powerpoint/2010/main" val="2527536133"/>
+        <p14:creationId xmlns:p14="http://schemas.microsoft.com/office/powerpoint/2010/main" val="106504787"/>
       </p:ext>
     </p:extLst>
   </p:cSld>
@@ -5105,7 +5108,7 @@
           <p:cNvPr id="2" name="テキスト ボックス 1">
             <a:extLst>
               <a:ext uri="{FF2B5EF4-FFF2-40B4-BE49-F238E27FC236}">
-                <a16:creationId xmlns:a16="http://schemas.microsoft.com/office/drawing/2014/main" id="{EFB4C2A4-7F67-E3C3-1654-0DD8A47BDFF2}"/>
+                <a16:creationId xmlns:a16="http://schemas.microsoft.com/office/drawing/2014/main" id="{EED55CF3-DF67-6138-1112-2A8C3E32FE64}"/>
               </a:ext>
             </a:extLst>
           </p:cNvPr>
@@ -5151,7 +5154,7 @@
           <p:cNvPr id="3" name="テキスト ボックス 2">
             <a:extLst>
               <a:ext uri="{FF2B5EF4-FFF2-40B4-BE49-F238E27FC236}">
-                <a16:creationId xmlns:a16="http://schemas.microsoft.com/office/drawing/2014/main" id="{1F353BA1-0473-ECBE-69D4-E7E00D3CCD5C}"/>
+                <a16:creationId xmlns:a16="http://schemas.microsoft.com/office/drawing/2014/main" id="{0DC345D0-6E74-BAE1-A451-F2D5D369873D}"/>
               </a:ext>
             </a:extLst>
           </p:cNvPr>
@@ -5191,7 +5194,7 @@
           <p:cNvPr id="4" name="テキスト ボックス 3">
             <a:extLst>
               <a:ext uri="{FF2B5EF4-FFF2-40B4-BE49-F238E27FC236}">
-                <a16:creationId xmlns:a16="http://schemas.microsoft.com/office/drawing/2014/main" id="{3C007A3D-14E0-7563-F23C-5642D1A5081B}"/>
+                <a16:creationId xmlns:a16="http://schemas.microsoft.com/office/drawing/2014/main" id="{12D688BA-7052-C583-2228-CCD105593FEC}"/>
               </a:ext>
             </a:extLst>
           </p:cNvPr>
@@ -5215,58 +5218,13 @@
           <a:lstStyle/>
           <a:p>
             <a:r>
-              <a:rPr kumimoji="1" lang="en-US" altLang="ja-JP" sz="2000">
-                <a:solidFill>
-                  <a:srgbClr val="333333"/>
-                </a:solidFill>
-                <a:latin typeface="Arial" panose="020B0604020202020204" pitchFamily="34" charset="0"/>
-              </a:rPr>
-              <a:t>CheckCostReportWatches: </a:t>
-            </a:r>
-            <a:r>
               <a:rPr kumimoji="1" lang="ja-JP" altLang="en-US" sz="2000">
                 <a:solidFill>
                   <a:srgbClr val="333333"/>
                 </a:solidFill>
                 <a:latin typeface="Arial" panose="020B0604020202020204" pitchFamily="34" charset="0"/>
               </a:rPr>
-              <a:t>検知カーソルを</a:t>
-            </a:r>
-            <a:r>
-              <a:rPr kumimoji="1" lang="en-US" altLang="ja-JP" sz="2000">
-                <a:solidFill>
-                  <a:srgbClr val="333333"/>
-                </a:solidFill>
-                <a:latin typeface="Arial" panose="020B0604020202020204" pitchFamily="34" charset="0"/>
-              </a:rPr>
-              <a:t>created_at</a:t>
-            </a:r>
-            <a:r>
-              <a:rPr kumimoji="1" lang="ja-JP" altLang="en-US" sz="2000">
-                <a:solidFill>
-                  <a:srgbClr val="333333"/>
-                </a:solidFill>
-                <a:latin typeface="Arial" panose="020B0604020202020204" pitchFamily="34" charset="0"/>
-              </a:rPr>
-              <a:t>から</a:t>
-            </a:r>
-            <a:r>
-              <a:rPr kumimoji="1" lang="en-US" altLang="ja-JP" sz="2000">
-                <a:solidFill>
-                  <a:srgbClr val="333333"/>
-                </a:solidFill>
-                <a:latin typeface="Arial" panose="020B0604020202020204" pitchFamily="34" charset="0"/>
-              </a:rPr>
-              <a:t>cost_reports.id</a:t>
-            </a:r>
-            <a:r>
-              <a:rPr kumimoji="1" lang="ja-JP" altLang="en-US" sz="2000">
-                <a:solidFill>
-                  <a:srgbClr val="333333"/>
-                </a:solidFill>
-                <a:latin typeface="Arial" panose="020B0604020202020204" pitchFamily="34" charset="0"/>
-              </a:rPr>
-              <a:t>ベースに変更</a:t>
+              <a:t>直近のコミットでは、新機能の追加と実装強化が行われました。</a:t>
             </a:r>
           </a:p>
         </p:txBody>
@@ -5276,7 +5234,7 @@
           <p:cNvPr id="5" name="テキスト ボックス 4">
             <a:extLst>
               <a:ext uri="{FF2B5EF4-FFF2-40B4-BE49-F238E27FC236}">
-                <a16:creationId xmlns:a16="http://schemas.microsoft.com/office/drawing/2014/main" id="{F51BCC8E-6722-F0D5-1D65-76F39988EBA0}"/>
+                <a16:creationId xmlns:a16="http://schemas.microsoft.com/office/drawing/2014/main" id="{E9749463-550F-803E-77F6-72A80231BEE5}"/>
               </a:ext>
             </a:extLst>
           </p:cNvPr>
@@ -5323,7 +5281,7 @@
             <a:hlinkClick r:id="" action="ppaction://media"/>
             <a:extLst>
               <a:ext uri="{FF2B5EF4-FFF2-40B4-BE49-F238E27FC236}">
-                <a16:creationId xmlns:a16="http://schemas.microsoft.com/office/drawing/2014/main" id="{2D411702-B500-1499-B4A6-A46266FC90B4}"/>
+                <a16:creationId xmlns:a16="http://schemas.microsoft.com/office/drawing/2014/main" id="{A0FAA219-82F5-2CCE-BECF-5652B9004E6C}"/>
               </a:ext>
             </a:extLst>
           </p:cNvPr>
@@ -5358,7 +5316,7 @@
     </p:spTree>
     <p:extLst>
       <p:ext uri="{BB962C8B-B14F-4D97-AF65-F5344CB8AC3E}">
-        <p14:creationId xmlns:p14="http://schemas.microsoft.com/office/powerpoint/2010/main" val="2966517177"/>
+        <p14:creationId xmlns:p14="http://schemas.microsoft.com/office/powerpoint/2010/main" val="2999637846"/>
       </p:ext>
     </p:extLst>
   </p:cSld>
@@ -5367,10 +5325,10 @@
   </p:clrMapOvr>
   <mc:AlternateContent xmlns:mc="http://schemas.openxmlformats.org/markup-compatibility/2006">
     <mc:Choice xmlns:p14="http://schemas.microsoft.com/office/powerpoint/2010/main" Requires="p14">
-      <p:transition spd="slow" p14:dur="2000" advTm="12000"/>
+      <p:transition spd="slow" p14:dur="2000" advTm="6000"/>
     </mc:Choice>
     <mc:Fallback>
-      <p:transition spd="slow" advTm="12000"/>
+      <p:transition spd="slow" advTm="6000"/>
     </mc:Fallback>
   </mc:AlternateContent>
   <p:timing>
@@ -5401,7 +5359,7 @@
                                   <p:childTnLst>
                                     <p:cmd type="call" cmd="playFrom(0.0)">
                                       <p:cBhvr>
-                                        <p:cTn id="6" dur="11469" fill="hold"/>
+                                        <p:cTn id="6" dur="5687" fill="hold"/>
                                         <p:tgtEl>
                                           <p:spTgt spid="6"/>
                                         </p:tgtEl>
@@ -5482,7 +5440,7 @@
           <p:cNvPr id="2" name="テキスト ボックス 1">
             <a:extLst>
               <a:ext uri="{FF2B5EF4-FFF2-40B4-BE49-F238E27FC236}">
-                <a16:creationId xmlns:a16="http://schemas.microsoft.com/office/drawing/2014/main" id="{E242E569-2108-19DE-F826-36E9064D0570}"/>
+                <a16:creationId xmlns:a16="http://schemas.microsoft.com/office/drawing/2014/main" id="{CF72204B-D386-B5B6-2860-08B60FA71ACB}"/>
               </a:ext>
             </a:extLst>
           </p:cNvPr>
@@ -5528,7 +5486,7 @@
           <p:cNvPr id="3" name="テキスト ボックス 2">
             <a:extLst>
               <a:ext uri="{FF2B5EF4-FFF2-40B4-BE49-F238E27FC236}">
-                <a16:creationId xmlns:a16="http://schemas.microsoft.com/office/drawing/2014/main" id="{DCF527C3-3CFB-A94F-20EC-CB13A673CF32}"/>
+                <a16:creationId xmlns:a16="http://schemas.microsoft.com/office/drawing/2014/main" id="{D92B083E-9396-28E2-8B3E-B3CD15259107}"/>
               </a:ext>
             </a:extLst>
           </p:cNvPr>
@@ -5568,7 +5526,7 @@
           <p:cNvPr id="4" name="テキスト ボックス 3">
             <a:extLst>
               <a:ext uri="{FF2B5EF4-FFF2-40B4-BE49-F238E27FC236}">
-                <a16:creationId xmlns:a16="http://schemas.microsoft.com/office/drawing/2014/main" id="{D3026EF2-4D77-B64E-3E54-C520A1D17801}"/>
+                <a16:creationId xmlns:a16="http://schemas.microsoft.com/office/drawing/2014/main" id="{2D2D71ED-4C06-2D34-A708-D1C59BA05E35}"/>
               </a:ext>
             </a:extLst>
           </p:cNvPr>
@@ -5633,7 +5591,7 @@
           <p:cNvPr id="5" name="テキスト ボックス 4">
             <a:extLst>
               <a:ext uri="{FF2B5EF4-FFF2-40B4-BE49-F238E27FC236}">
-                <a16:creationId xmlns:a16="http://schemas.microsoft.com/office/drawing/2014/main" id="{005A60A7-17CA-5641-33B9-8FCA5FFD59F7}"/>
+                <a16:creationId xmlns:a16="http://schemas.microsoft.com/office/drawing/2014/main" id="{72D99946-FD76-5D0B-106F-D799AC81F15F}"/>
               </a:ext>
             </a:extLst>
           </p:cNvPr>
@@ -5680,7 +5638,7 @@
             <a:hlinkClick r:id="" action="ppaction://media"/>
             <a:extLst>
               <a:ext uri="{FF2B5EF4-FFF2-40B4-BE49-F238E27FC236}">
-                <a16:creationId xmlns:a16="http://schemas.microsoft.com/office/drawing/2014/main" id="{5B9E8A86-D07E-1ECD-2A2B-F4AC5672835A}"/>
+                <a16:creationId xmlns:a16="http://schemas.microsoft.com/office/drawing/2014/main" id="{0CCF6222-D472-FE79-B3B9-61D57F03ECED}"/>
               </a:ext>
             </a:extLst>
           </p:cNvPr>
@@ -5715,7 +5673,7 @@
     </p:spTree>
     <p:extLst>
       <p:ext uri="{BB962C8B-B14F-4D97-AF65-F5344CB8AC3E}">
-        <p14:creationId xmlns:p14="http://schemas.microsoft.com/office/powerpoint/2010/main" val="1487909544"/>
+        <p14:creationId xmlns:p14="http://schemas.microsoft.com/office/powerpoint/2010/main" val="2835285985"/>
       </p:ext>
     </p:extLst>
   </p:cSld>
